--- a/pitch/organoid_growth_charts_final.pptx
+++ b/pitch/organoid_growth_charts_final.pptx
@@ -4538,7 +4538,7 @@
               </a:defRPr>
             </a:pPr>
             <a:r>
-              <a:t>• Final model calibration on the 26 test organoids: z roughly N(0,1) overall, in every age bin, in every publication. Remaining skew 0.78 comes from three day-32 organoids near zero.</a:t>
+              <a:t>• Final model calibration on the 26 test organoids: z roughly N(0,1) overall, in every age bin, in every publication. Remaining skew 0.78 is driven by one test organoid at day 70 with 84% progenitors (z = +2.7).</a:t>
             </a:r>
           </a:p>
         </p:txBody>
